--- a/dist/pptx/Glauca-Dark.pptx
+++ b/dist/pptx/Glauca-Dark.pptx
@@ -4732,7 +4732,7 @@
                 </a:solidFill>
                 <a:latin typeface="IBM Plex Sans"/>
               </a:rPr>
-              <a:t>github.com/tiagojct/glauca</a:t>
+              <a:t>git.tiagojct.eu/tiagojct/glauca</a:t>
             </a:r>
           </a:p>
         </p:txBody>
